--- a/1.studyCS1(コンストラクタと継承まで)/Ge1_5_メソッド(関数).pptx
+++ b/1.studyCS1(コンストラクタと継承まで)/Ge1_5_メソッド(関数).pptx
@@ -282,7 +282,7 @@
           <a:p>
             <a:fld id="{691E08CE-871E-42A1-882B-8194E9FA60B7}" type="datetimeFigureOut">
               <a:rPr kumimoji="1" lang="ja-JP" altLang="en-US" smtClean="0"/>
-              <a:t>2023/5/11</a:t>
+              <a:t>2025/6/23</a:t>
             </a:fld>
             <a:endParaRPr kumimoji="1" lang="ja-JP" altLang="en-US"/>
           </a:p>
@@ -512,7 +512,7 @@
           <a:p>
             <a:fld id="{691E08CE-871E-42A1-882B-8194E9FA60B7}" type="datetimeFigureOut">
               <a:rPr kumimoji="1" lang="ja-JP" altLang="en-US" smtClean="0"/>
-              <a:t>2023/5/11</a:t>
+              <a:t>2025/6/23</a:t>
             </a:fld>
             <a:endParaRPr kumimoji="1" lang="ja-JP" altLang="en-US"/>
           </a:p>
@@ -752,7 +752,7 @@
           <a:p>
             <a:fld id="{691E08CE-871E-42A1-882B-8194E9FA60B7}" type="datetimeFigureOut">
               <a:rPr kumimoji="1" lang="ja-JP" altLang="en-US" smtClean="0"/>
-              <a:t>2023/5/11</a:t>
+              <a:t>2025/6/23</a:t>
             </a:fld>
             <a:endParaRPr kumimoji="1" lang="ja-JP" altLang="en-US"/>
           </a:p>
@@ -982,7 +982,7 @@
           <a:p>
             <a:fld id="{691E08CE-871E-42A1-882B-8194E9FA60B7}" type="datetimeFigureOut">
               <a:rPr kumimoji="1" lang="ja-JP" altLang="en-US" smtClean="0"/>
-              <a:t>2023/5/11</a:t>
+              <a:t>2025/6/23</a:t>
             </a:fld>
             <a:endParaRPr kumimoji="1" lang="ja-JP" altLang="en-US"/>
           </a:p>
@@ -1257,7 +1257,7 @@
           <a:p>
             <a:fld id="{691E08CE-871E-42A1-882B-8194E9FA60B7}" type="datetimeFigureOut">
               <a:rPr kumimoji="1" lang="ja-JP" altLang="en-US" smtClean="0"/>
-              <a:t>2023/5/11</a:t>
+              <a:t>2025/6/23</a:t>
             </a:fld>
             <a:endParaRPr kumimoji="1" lang="ja-JP" altLang="en-US"/>
           </a:p>
@@ -1586,7 +1586,7 @@
           <a:p>
             <a:fld id="{691E08CE-871E-42A1-882B-8194E9FA60B7}" type="datetimeFigureOut">
               <a:rPr kumimoji="1" lang="ja-JP" altLang="en-US" smtClean="0"/>
-              <a:t>2023/5/11</a:t>
+              <a:t>2025/6/23</a:t>
             </a:fld>
             <a:endParaRPr kumimoji="1" lang="ja-JP" altLang="en-US"/>
           </a:p>
@@ -2062,7 +2062,7 @@
           <a:p>
             <a:fld id="{691E08CE-871E-42A1-882B-8194E9FA60B7}" type="datetimeFigureOut">
               <a:rPr kumimoji="1" lang="ja-JP" altLang="en-US" smtClean="0"/>
-              <a:t>2023/5/11</a:t>
+              <a:t>2025/6/23</a:t>
             </a:fld>
             <a:endParaRPr kumimoji="1" lang="ja-JP" altLang="en-US"/>
           </a:p>
@@ -2203,7 +2203,7 @@
           <a:p>
             <a:fld id="{691E08CE-871E-42A1-882B-8194E9FA60B7}" type="datetimeFigureOut">
               <a:rPr kumimoji="1" lang="ja-JP" altLang="en-US" smtClean="0"/>
-              <a:t>2023/5/11</a:t>
+              <a:t>2025/6/23</a:t>
             </a:fld>
             <a:endParaRPr kumimoji="1" lang="ja-JP" altLang="en-US"/>
           </a:p>
@@ -2316,7 +2316,7 @@
           <a:p>
             <a:fld id="{691E08CE-871E-42A1-882B-8194E9FA60B7}" type="datetimeFigureOut">
               <a:rPr kumimoji="1" lang="ja-JP" altLang="en-US" smtClean="0"/>
-              <a:t>2023/5/11</a:t>
+              <a:t>2025/6/23</a:t>
             </a:fld>
             <a:endParaRPr kumimoji="1" lang="ja-JP" altLang="en-US"/>
           </a:p>
@@ -2659,7 +2659,7 @@
           <a:p>
             <a:fld id="{691E08CE-871E-42A1-882B-8194E9FA60B7}" type="datetimeFigureOut">
               <a:rPr kumimoji="1" lang="ja-JP" altLang="en-US" smtClean="0"/>
-              <a:t>2023/5/11</a:t>
+              <a:t>2025/6/23</a:t>
             </a:fld>
             <a:endParaRPr kumimoji="1" lang="ja-JP" altLang="en-US"/>
           </a:p>
@@ -2947,7 +2947,7 @@
           <a:p>
             <a:fld id="{691E08CE-871E-42A1-882B-8194E9FA60B7}" type="datetimeFigureOut">
               <a:rPr kumimoji="1" lang="ja-JP" altLang="en-US" smtClean="0"/>
-              <a:t>2023/5/11</a:t>
+              <a:t>2025/6/23</a:t>
             </a:fld>
             <a:endParaRPr kumimoji="1" lang="ja-JP" altLang="en-US"/>
           </a:p>
@@ -3220,7 +3220,7 @@
           <a:p>
             <a:fld id="{691E08CE-871E-42A1-882B-8194E9FA60B7}" type="datetimeFigureOut">
               <a:rPr kumimoji="1" lang="ja-JP" altLang="en-US" smtClean="0"/>
-              <a:t>2023/5/11</a:t>
+              <a:t>2025/6/23</a:t>
             </a:fld>
             <a:endParaRPr kumimoji="1" lang="ja-JP" altLang="en-US"/>
           </a:p>
@@ -5268,7 +5268,7 @@
         <p:spPr>
           <a:xfrm>
             <a:off x="418869" y="1606601"/>
-            <a:ext cx="5677131" cy="4524315"/>
+            <a:ext cx="5677131" cy="4154984"/>
           </a:xfrm>
           <a:prstGeom prst="rect">
             <a:avLst/>
@@ -5295,19 +5295,16 @@
               <a:rPr kumimoji="1" lang="ja-JP" altLang="en-US" sz="2400" dirty="0"/>
               <a:t>・初速度</a:t>
             </a:r>
-            <a:endParaRPr kumimoji="1" lang="en-US" altLang="ja-JP" sz="2400" dirty="0"/>
-          </a:p>
-          <a:p>
-            <a:r>
-              <a:rPr kumimoji="1" lang="ja-JP" altLang="en-US" sz="2400" dirty="0"/>
-              <a:t>・速度</a:t>
-            </a:r>
-            <a:endParaRPr kumimoji="1" lang="en-US" altLang="ja-JP" sz="2400" dirty="0"/>
-          </a:p>
-          <a:p>
+            <a:endParaRPr lang="en-US" altLang="ja-JP" sz="2400" dirty="0"/>
+          </a:p>
+          <a:p>
+            <a:r>
+              <a:rPr lang="ja-JP" altLang="en-US" sz="2400"/>
+              <a:t>・</a:t>
+            </a:r>
             <a:r>
               <a:rPr lang="ja-JP" altLang="en-US" sz="2400" dirty="0"/>
-              <a:t>・加速度</a:t>
+              <a:t>加速度</a:t>
             </a:r>
             <a:endParaRPr lang="en-US" altLang="ja-JP" sz="2400" dirty="0"/>
           </a:p>
